--- a/slides/decks/s28-aggressive-lymphoma.pptx
+++ b/slides/decks/s28-aggressive-lymphoma.pptx
@@ -135,13 +135,13 @@
   <p:extLst>
     <p:ext uri="{521415D9-36F7-43E2-AB2F-B90AF26B5E84}">
       <p14:sectionLst xmlns:p14="http://schemas.microsoft.com/office/powerpoint/2010/main">
-        <p14:section name="Opening" id="{61787a85-030a-a97a-1785-a62a8a128895}">
+        <p14:section name="Opening" id="{a96f873c-bb83-0fcd-3c35-29472bca483a}">
           <p14:sldIdLst>
             <p14:sldId id="256"/>
             <p14:sldId id="257"/>
           </p14:sldIdLst>
         </p14:section>
-        <p14:section name="Large B-cell lymphoma" id="{cb832ad4-38ac-c363-dfb7-0807e53cb44f}">
+        <p14:section name="Large B-cell lymphoma" id="{325e1f2b-b860-d673-3c1e-cb34e34cdb3e}">
           <p14:sldIdLst>
             <p14:sldId id="258"/>
             <p14:sldId id="259"/>
@@ -151,14 +151,14 @@
             <p14:sldId id="263"/>
           </p14:sldIdLst>
         </p14:section>
-        <p14:section name="Mantle cell lymphoma" id="{568c076c-4828-d414-4166-6dac01fef7f5}">
+        <p14:section name="Mantle cell lymphoma" id="{255cc63c-8c3f-862e-38fd-10003ec9dc85}">
           <p14:sldIdLst>
             <p14:sldId id="264"/>
             <p14:sldId id="265"/>
             <p14:sldId id="266"/>
           </p14:sldIdLst>
         </p14:section>
-        <p14:section name="Other aggressive lymphomas" id="{d1186294-d2b8-2261-51cf-7a472cb893b7}">
+        <p14:section name="Other aggressive lymphomas" id="{a63874c0-2089-b314-6131-118335e10139}">
           <p14:sldIdLst>
             <p14:sldId id="267"/>
             <p14:sldId id="268"/>
@@ -166,7 +166,7 @@
             <p14:sldId id="270"/>
           </p14:sldIdLst>
         </p14:section>
-        <p14:section name="Board questions" id="{5d19a67b-ef9f-4bd9-6bea-9cc9a4af164a}">
+        <p14:section name="Board questions" id="{73a0a5a6-6d91-618a-473e-13c3e4f45129}">
           <p14:sldIdLst>
             <p14:sldId id="271"/>
             <p14:sldId id="272"/>
@@ -176,7 +176,7 @@
             <p14:sldId id="276"/>
           </p14:sldIdLst>
         </p14:section>
-        <p14:section name="References" id="{4d03ddf4-b2cd-59f6-5db3-55889448eded}">
+        <p14:section name="References" id="{199d6e14-a7a7-3b6d-1615-2310892d359b}">
           <p14:sldIdLst>
             <p14:sldId id="277"/>
             <p14:sldId id="278"/>
@@ -185,7 +185,7 @@
             <p14:sldId id="281"/>
           </p14:sldIdLst>
         </p14:section>
-        <p14:section name="Backup" id="{3798dbc4-6bca-929e-8511-36f268355e35}">
+        <p14:section name="Backup" id="{b4aa34f4-bb70-4f3e-113c-cf1aca271dd6}">
           <p14:sldIdLst>
             <p14:sldId id="282"/>
             <p14:sldId id="283"/>
@@ -615,6 +615,17 @@
               <a:t>各位好，第 28 堂講 aggressive lymphoma 的移植，對應 EBMT Handbook 第 86 到 88 章。先講 large B-cell lymphoma，再講 mantle cell，最後是 Burkitt、T-cell 和 HIV 相關淋巴瘤，結尾三題練習。</a:t>
             </a:r>
           </a:p>
+          <a:p>
+            <a:pPr>
+              <a:spcAft>
+                <a:spcPts val="600"/>
+              </a:spcAft>
+            </a:pPr>
+            <a:r>
+              <a:rPr lang="en-US" dirty="0"/>
+              <a:t>Large B-cell 這段最長，大約十分鐘，因為 CAR-T 進到第二線之後，auto 的適應症整個改寫，題目也跟著改。</a:t>
+            </a:r>
+          </a:p>
         </p:txBody>
       </p:sp>
       <p:sp>
@@ -751,6 +762,17 @@
               <a:t>第三欄，CAR-T 之後復發，fit 的病人要評估 allo-HCT，這是第 87 章的 key point。最右邊是例外，有一小群 relapsed MCL 沒做 allo 也活過五年，Ki67 低、病程偏 indolent，這些人可能不需要 allo。</a:t>
             </a:r>
           </a:p>
+          <a:p>
+            <a:pPr>
+              <a:spcAft>
+                <a:spcPts val="600"/>
+              </a:spcAft>
+            </a:pPr>
+            <a:r>
+              <a:rPr lang="en-US" dirty="0"/>
+              <a:t>這張樹狀圖的順序和 LBCL 很像，都是 CAR-T 先、allo 後，但理由不同。LBCL 是因為 phase III 證明 CAR-T 勝過 auto；MCL 則是因為 brexu-cel 比 allo 安全，而且對 auto 後早期復發的病人效果較好，兩者還沒有直接比較。</a:t>
+            </a:r>
+          </a:p>
         </p:txBody>
       </p:sp>
       <p:sp>
@@ -883,6 +905,17 @@
               </a:spcAft>
             </a:pPr>
             <a:r>
+              <a:rPr lang="en-US" dirty="0"/>
+              <a:t>數字的比較要小心解讀。Brexu-cel 的資料來自 BTKi 之後的單臂研究，allo 的資料是 registry，族群不同。書上的結論是 CAR-T 的 curative potential 還不清楚，所以 CAR-T 之後復發的病人，allo 仍要評估，這兩種治療是接力，不是二選一。</a:t>
+            </a:r>
+          </a:p>
+          <a:p>
+            <a:pPr>
+              <a:spcAft>
+                <a:spcPts val="600"/>
+              </a:spcAft>
+            </a:pPr>
+            <a:r>
               <a:rPr lang="en-US" b="1" dirty="0"/>
               <a:t>講者提醒（不念出來）：</a:t>
             </a:r>
@@ -1030,6 +1063,17 @@
               </a:spcAft>
             </a:pPr>
             <a:r>
+              <a:rPr lang="en-US" dirty="0"/>
+              <a:t>兩種疾病放在一起看，共同點是 first line 就要夠強，第一線失敗後的救援很困難。Burkitt 復發後要拿到足夠的反應去收集幹細胞都不容易，所以 auto 很少用；LBL 則因為多數中心偏好有 GVL 的 allo，auto 的資料很少，書上的結論是無法下定論。</a:t>
+            </a:r>
+          </a:p>
+          <a:p>
+            <a:pPr>
+              <a:spcAft>
+                <a:spcPts val="600"/>
+              </a:spcAft>
+            </a:pPr>
+            <a:r>
               <a:rPr lang="en-US" b="1" dirty="0"/>
               <a:t>講者提醒（不念出來）：</a:t>
             </a:r>
@@ -1192,6 +1236,17 @@
               <a:t>這兩欄的比較是典型考法，auto 比較安全、allo 比較少復發。不能做強烈治療的復發病人，可以用 gemcitabine 或 CD30 陽性者用 brentuximab vedotin。</a:t>
             </a:r>
           </a:p>
+          <a:p>
+            <a:pPr>
+              <a:spcAft>
+                <a:spcPts val="600"/>
+              </a:spcAft>
+            </a:pPr>
+            <a:r>
+              <a:rPr lang="en-US" dirty="0"/>
+              <a:t>另外，PTCL 的 allo 表格裡 graft failure 小於 10%，GVHD prophylaxis 用 CsA、CsA 加 MTX 或 CsA 加 MMF。表格的資料來源包括 Dodero 2012，DLI 有反應，支持 graft-versus-lymphoma effect 存在。考題常拿 auto 和 allo 的 TRM、復發率做對比，兩欄數字最好一起記。</a:t>
+            </a:r>
+          </a:p>
         </p:txBody>
       </p:sp>
       <p:sp>
@@ -1306,6 +1361,17 @@
               <a:t>Stage I 到 IIA 是 patch 和 plaque，病程緩慢，以 topical steroid、光照治療、total skin electron beam 等 skin-directed therapy 為主。IIB 到 IV 有 erythroderma、腫瘤或血液、淋巴結、內臟侵犯，中位存活只有 2 到 5 年。Brentuximab 和 mogamulizumab 有效但反應短，allo-HCT 是唯一可能治癒的方法，EBMT 長期追蹤可救回超過三分之一，失敗主因是復發。</a:t>
             </a:r>
           </a:p>
+          <a:p>
+            <a:pPr>
+              <a:spcAft>
+                <a:spcPts val="600"/>
+              </a:spcAft>
+            </a:pPr>
+            <a:r>
+              <a:rPr lang="en-US" dirty="0"/>
+              <a:t>近年的趨勢是更早做 allo，年紀較大的病人和 unrelated donor 也越來越多。題目如果出現 Sézary syndrome 已用過多線全身治療的年輕病人，問唯一可能治癒的方法，答案就是 allo-HCT。</a:t>
+            </a:r>
+          </a:p>
         </p:txBody>
       </p:sp>
       <p:sp>
@@ -1442,6 +1508,17 @@
               <a:t>Allo 經驗有限，目前沒有確定的建議。一個五位病人的報告沒有 TRM，持續 cART 下 viral load 測不到。CAR-T 也有少數 case report 顯示可行。</a:t>
             </a:r>
           </a:p>
+          <a:p>
+            <a:pPr>
+              <a:spcAft>
+                <a:spcPts val="600"/>
+              </a:spcAft>
+            </a:pPr>
+            <a:r>
+              <a:rPr lang="en-US" dirty="0"/>
+              <a:t>題目常見的陷阱是 CD4 很低的病人，選項寫「HIV 陽性不能做 auto」。在 cART 和 rituximab 的時代，這個說法不成立，重點是治療全程不中斷 cART，並處理好伺機感染的預防。</a:t>
+            </a:r>
+          </a:p>
         </p:txBody>
       </p:sp>
       <p:sp>
@@ -1556,6 +1633,17 @@
               <a:t>[Pause for answers.]</a:t>
             </a:r>
           </a:p>
+          <a:p>
+            <a:pPr>
+              <a:spcAft>
+                <a:spcPts val="600"/>
+              </a:spcAft>
+            </a:pPr>
+            <a:r>
+              <a:rPr lang="en-US" dirty="0"/>
+              <a:t>這題的資訊很多，但真正決定答案的是兩個，一個是復發距離 first-line 結束多久，另一個是 salvage 後有沒有反應。IPI 和 cell of origin 在這題用不到。</a:t>
+            </a:r>
+          </a:p>
         </p:txBody>
       </p:sp>
       <p:sp>
@@ -1670,6 +1758,17 @@
               <a:t>A 是最大的陷阱。CAR-T 在第二線勝過 auto 的兩個 phase III，收的是 refractory 或 12 個月內復發的病人。題目如果改成 7 個月復發，答案就變成 A。B 的 allo 留到 CAR-T 失敗後；D 的 rituximab maintenance 在 CORAL 沒有好處；E 的 tandem auto 在 rituximab 時代沒有資料。</a:t>
             </a:r>
           </a:p>
+          <a:p>
+            <a:pPr>
+              <a:spcAft>
+                <a:spcPts val="600"/>
+              </a:spcAft>
+            </a:pPr>
+            <a:r>
+              <a:rPr lang="en-US" dirty="0"/>
+              <a:t>如果題目變成 R-ICE 後只有 stable disease，答案也會改成 CAR-T，因為 auto 需要 chemosensitivity，Fig. 86.1 也是這樣畫的。</a:t>
+            </a:r>
+          </a:p>
         </p:txBody>
       </p:sp>
       <p:sp>
@@ -1784,6 +1883,17 @@
               <a:t>[Pause for answers.]</a:t>
             </a:r>
           </a:p>
+          <a:p>
+            <a:pPr>
+              <a:spcAft>
+                <a:spcPts val="600"/>
+              </a:spcAft>
+            </a:pPr>
+            <a:r>
+              <a:rPr lang="en-US" dirty="0"/>
+              <a:t>病人已經用過 ibrutinib，也已經做過一次 auto，體能狀態還不錯，器官功能正常。這三個條件都會影響答案，關鍵在第 87 章怎麼排 MCL 復發後的治療順序，以及每一種選擇各自的前提。</a:t>
+            </a:r>
+          </a:p>
         </p:txBody>
       </p:sp>
       <p:sp>
@@ -1898,6 +2008,17 @@
               <a:t>E 是主要的干擾。Allo 對 MCL 確實有 graft-versus-MCL effect，但書上把它放在 CAR-T 之後；而且 in vivo T-cell depletion 用 alemtuzumab 的病人復發較多，這個細節也排除 E。A 的第二次 auto 只有 2% 病人做，僅一人長期存活。D 的觀察只適合 Ki67 低、病程 indolent 的少數人，不是正在惡化的病人。</a:t>
             </a:r>
           </a:p>
+          <a:p>
+            <a:pPr>
+              <a:spcAft>
+                <a:spcPts val="600"/>
+              </a:spcAft>
+            </a:pPr>
+            <a:r>
+              <a:rPr lang="en-US" dirty="0"/>
+              <a:t>如果病人之後對 CAR-T 也失敗，而且仍然 fit、疾病有反應，這時才輪到 allo，最好選 RIC，避免 alemtuzumab。</a:t>
+            </a:r>
+          </a:p>
         </p:txBody>
       </p:sp>
       <p:sp>
@@ -2023,6 +2144,17 @@
               <a:t>第三段是第 88 章的五種疾病，Burkitt、lymphoblastic lymphoma、PTCL、cutaneous T-cell lymphoma 和 HIV 相關淋巴瘤。這一章的考點多半在它的小表格，哪個 remission 做 auto、哪個做 allo、TRM 多少。最後三題 board-style，各對應一段。</a:t>
             </a:r>
           </a:p>
+          <a:p>
+            <a:pPr>
+              <a:spcAft>
+                <a:spcPts val="600"/>
+              </a:spcAft>
+            </a:pPr>
+            <a:r>
+              <a:rPr lang="en-US" dirty="0"/>
+              <a:t>Burkitt 和 PTCL 的數字看起來零散，我會盡量並排，方便比較。</a:t>
+            </a:r>
+          </a:p>
         </p:txBody>
       </p:sp>
       <p:sp>
@@ -2137,6 +2269,17 @@
               <a:t>[Pause for answers.]</a:t>
             </a:r>
           </a:p>
+          <a:p>
+            <a:pPr>
+              <a:spcAft>
+                <a:spcPts val="600"/>
+              </a:spcAft>
+            </a:pPr>
+            <a:r>
+              <a:rPr lang="en-US" dirty="0"/>
+              <a:t>這題的設計重點是 remission 的時間點和 IPI。PTCL 和 LBCL 在 CR1 的處理並不相同，另外題目特別給了一位 HLA 相合的姊姊，這個 donor 會不會改變答案，也是要判斷的地方。CD30 陰性這個條件也不是隨便給的。</a:t>
+            </a:r>
+          </a:p>
         </p:txBody>
       </p:sp>
       <p:sp>
@@ -2251,6 +2394,17 @@
               <a:t>B 是最常被選的錯誤答案，因為她有 sibling donor。但 PTCL 的 allo 適應症是 CR2 以上或 auto 後復發，而且書上是 RIC 優於 MAC，一年 TRM 20 到 25%，CR1 不划算。C 的 brentuximab 要 CD30 陽性；E 的 CD19 CAR-T 對 T-cell lymphoma 沒有標靶。</a:t>
             </a:r>
           </a:p>
+          <a:p>
+            <a:pPr>
+              <a:spcAft>
+                <a:spcPts val="600"/>
+              </a:spcAft>
+            </a:pPr>
+            <a:r>
+              <a:rPr lang="en-US" dirty="0"/>
+              <a:t>和 LBCL 對照，LBCL 在 CR1 一般不做 auto，PTCL 在 CR1 卻是適應症，這個差別正是本題要測的。如果她之後復發，再考慮 sibling 的 RIC allo。</a:t>
+            </a:r>
+          </a:p>
         </p:txBody>
       </p:sp>
       <p:sp>
@@ -3106,6 +3260,17 @@
               <a:t>First line 是 R-CHOP 六個 cycle，rituximab 375 mg/m²。IPI 2 以上加 polatuzumab 的 pola-R-CHP，PFS 比較好。First-line 做 auto consolidation 沒有證據支持，例外是 high-grade B-cell lymphoma 用 R-CHOP 類治療，或診斷時就有 CNS 侵犯、而且對化療有反應的病人。</a:t>
             </a:r>
           </a:p>
+          <a:p>
+            <a:pPr>
+              <a:spcAft>
+                <a:spcPts val="600"/>
+              </a:spcAft>
+            </a:pPr>
+            <a:r>
+              <a:rPr lang="en-US" dirty="0"/>
+              <a:t>CD19 要特別記錄，是因為復發時要用 CD19 CAR-T，如果腫瘤已經失去 CD19，這條路就走不通。復發時書上也建議重新切片，確認組織型態和標記，不要只靠影像。</a:t>
+            </a:r>
+          </a:p>
         </p:txBody>
       </p:sp>
       <p:sp>
@@ -3250,7 +3415,18 @@
             </a:pPr>
             <a:r>
               <a:rPr lang="en-US" dirty="0"/>
-              <a:t>考試最常變化的是 12 個月這個數字，以及 salvage 後的反應，請把這兩個分歧點當作題目的主軸。</a:t>
+              <a:t>考試最常變化的是 12 個月這個數字，以及 salvage 後的反應，題目幾乎都在這兩個分歧點上做文章。</a:t>
+            </a:r>
+          </a:p>
+          <a:p>
+            <a:pPr>
+              <a:spcAft>
+                <a:spcPts val="600"/>
+              </a:spcAft>
+            </a:pPr>
+            <a:r>
+              <a:rPr lang="en-US" dirty="0"/>
+              <a:t>這張圖還有一個容易漏掉的細節。Late relapse 的病人如果 salvage 失敗，並不是直接放棄，而是轉去 CAR-T，因為 CAR-T 不要求 chemosensitivity。所以 auto 只收 salvage 有反應的人，其餘的人都匯流到 CAR-T。病房裡常見的情況是 salvage 兩個 cycle 後 PET 仍是陽性，這時就要準備 CAR-T 的轉介。</a:t>
             </a:r>
           </a:p>
         </p:txBody>
@@ -3396,6 +3572,17 @@
               </a:spcAft>
             </a:pPr>
             <a:r>
+              <a:rPr lang="en-US" dirty="0"/>
+              <a:t>Late relapse 還留給 auto，是因為這群人對化療的反應本來就比較好，salvage 加 auto 的長期結果已經足夠，第二線 CAR-T 的 phase III 也沒有收這群病人。反過來說，early relapse 做 auto 的結果差，所以讓位給 CAR-T。BEAM 的晚期毒性不少，第二癌是最常見的 NRM 原因，這也是為什麼不在 first line 常規做 auto。</a:t>
+            </a:r>
+          </a:p>
+          <a:p>
+            <a:pPr>
+              <a:spcAft>
+                <a:spcPts val="600"/>
+              </a:spcAft>
+            </a:pPr>
+            <a:r>
               <a:rPr lang="en-US" b="1" dirty="0"/>
               <a:t>講者提醒（不念出來）：</a:t>
             </a:r>
@@ -3536,6 +3723,17 @@
               <a:t>預後不良因子有四個，induction 後 12 個月內復發、secondary age-adjusted IPI、performance status 差、復發時兩處以上 extranodal。Salvage 後 PET 陰性代表 chemosensitive，也預測 auto 的結果。移植後 rituximab maintenance 在 CORAL 沒有好處，tandem auto 在 rituximab 時代沒有資料。</a:t>
             </a:r>
           </a:p>
+          <a:p>
+            <a:pPr>
+              <a:spcAft>
+                <a:spcPts val="600"/>
+              </a:spcAft>
+            </a:pPr>
+            <a:r>
+              <a:rPr lang="en-US" dirty="0"/>
+              <a:t>實際選擇時，R-DHAP 含 cisplatin，腎功能差的人要小心；R-GDP 可以門診給，對年長病人比較方便。這些是書上「依個別病人特性選擇」的具體意思。治療前也要評估心、肺、腎、肝功能。</a:t>
+            </a:r>
+          </a:p>
         </p:txBody>
       </p:sp>
       <p:sp>
@@ -3683,6 +3881,17 @@
               <a:t>臨床上，當 refractory 的病人來到門診，CAR-T 的製造需要時間，這段期間的 bridging 能不能控制疾病，往往決定後面還有沒有 allo 這條路。</a:t>
             </a:r>
           </a:p>
+          <a:p>
+            <a:pPr>
+              <a:spcAft>
+                <a:spcPts val="600"/>
+              </a:spcAft>
+            </a:pPr>
+            <a:r>
+              <a:rPr lang="en-US" dirty="0"/>
+              <a:t>三欄的 fitness 要求也可以倒過來記。最不挑病人的是 CAR-T，其次是 auto，最挑的是 allo。題目給一位 75 歲、有心衰竭、對 salvage 沒反應的病人，能考慮的細胞治療只剩 CAR-T。</a:t>
+            </a:r>
+          </a:p>
         </p:txBody>
       </p:sp>
       <p:sp>
@@ -3815,6 +4024,17 @@
               </a:spcAft>
             </a:pPr>
             <a:r>
+              <a:rPr lang="en-US" dirty="0"/>
+              <a:t>三個系列的 NRM 都在三成左右，和 auto 的 1.4% 差了二十倍以上，這就是為什麼 allo 一直排在 CAR-T 之後。Glass 2014 是唯一的 randomized 資料，收的是 T 和 B 的 aggressive lymphoma，用 MAC，三年 PFS 只有 25%。</a:t>
+            </a:r>
+          </a:p>
+          <a:p>
+            <a:pPr>
+              <a:spcAft>
+                <a:spcPts val="600"/>
+              </a:spcAft>
+            </a:pPr>
+            <a:r>
               <a:rPr lang="en-US" b="1" dirty="0"/>
               <a:t>講者提醒（不念出來）：</a:t>
             </a:r>
@@ -3953,6 +4173,17 @@
             <a:r>
               <a:rPr lang="en-US" dirty="0"/>
               <a:t>最後一步是 TRIANGLE，induction 和 maintenance 加入 ibrutinib，書上認為這是年輕 fit 病人新的 first-line standard。另一組 ibrutinib 加 HD-AraC 但不做 auto，結果比傳統 HD-AraC 加 auto 好；auto 能不能完全省略，要等更長的追蹤。MIPI low-risk 和 TP53 突變的病人，auto 的價值本來就要重新討論。</a:t>
+            </a:r>
+          </a:p>
+          <a:p>
+            <a:pPr>
+              <a:spcAft>
+                <a:spcPts val="600"/>
+              </a:spcAft>
+            </a:pPr>
+            <a:r>
+              <a:rPr lang="en-US" dirty="0"/>
+              <a:t>補充一下 TP53。書上說 TP53 突變的 MCL 不太可能從 high-dose chemotherapy 和 auto 得到好處，key point 也寫，對化療沒反應的 TP53 病人，CR1 的 auto 要質疑。這是 MCL 很典型的考點。</a:t>
             </a:r>
           </a:p>
         </p:txBody>

--- a/slides/decks/s28-aggressive-lymphoma.pptx
+++ b/slides/decks/s28-aggressive-lymphoma.pptx
@@ -135,13 +135,13 @@
   <p:extLst>
     <p:ext uri="{521415D9-36F7-43E2-AB2F-B90AF26B5E84}">
       <p14:sectionLst xmlns:p14="http://schemas.microsoft.com/office/powerpoint/2010/main">
-        <p14:section name="Opening" id="{a96f873c-bb83-0fcd-3c35-29472bca483a}">
+        <p14:section name="Opening" id="{5f7cc73f-be53-130f-d772-8d1d0b5759ed}">
           <p14:sldIdLst>
             <p14:sldId id="256"/>
             <p14:sldId id="257"/>
           </p14:sldIdLst>
         </p14:section>
-        <p14:section name="Large B-cell lymphoma" id="{325e1f2b-b860-d673-3c1e-cb34e34cdb3e}">
+        <p14:section name="Large B-cell lymphoma" id="{5b83aa19-1823-2548-4b52-ec3de56a75ac}">
           <p14:sldIdLst>
             <p14:sldId id="258"/>
             <p14:sldId id="259"/>
@@ -151,14 +151,14 @@
             <p14:sldId id="263"/>
           </p14:sldIdLst>
         </p14:section>
-        <p14:section name="Mantle cell lymphoma" id="{255cc63c-8c3f-862e-38fd-10003ec9dc85}">
+        <p14:section name="Mantle cell lymphoma" id="{6a4332bf-f45d-333b-2674-5a795641d28e}">
           <p14:sldIdLst>
             <p14:sldId id="264"/>
             <p14:sldId id="265"/>
             <p14:sldId id="266"/>
           </p14:sldIdLst>
         </p14:section>
-        <p14:section name="Other aggressive lymphomas" id="{a63874c0-2089-b314-6131-118335e10139}">
+        <p14:section name="Other aggressive lymphomas" id="{3b0c7afb-9ae2-fba1-9b67-92ae9aaa7cf6}">
           <p14:sldIdLst>
             <p14:sldId id="267"/>
             <p14:sldId id="268"/>
@@ -166,7 +166,7 @@
             <p14:sldId id="270"/>
           </p14:sldIdLst>
         </p14:section>
-        <p14:section name="Board questions" id="{73a0a5a6-6d91-618a-473e-13c3e4f45129}">
+        <p14:section name="Board questions" id="{5eafbf2e-c4bc-7329-865e-b657da0c73c0}">
           <p14:sldIdLst>
             <p14:sldId id="271"/>
             <p14:sldId id="272"/>
@@ -176,7 +176,7 @@
             <p14:sldId id="276"/>
           </p14:sldIdLst>
         </p14:section>
-        <p14:section name="References" id="{199d6e14-a7a7-3b6d-1615-2310892d359b}">
+        <p14:section name="References" id="{e2713189-7034-e38e-6980-0ee42424450d}">
           <p14:sldIdLst>
             <p14:sldId id="277"/>
             <p14:sldId id="278"/>
@@ -185,7 +185,7 @@
             <p14:sldId id="281"/>
           </p14:sldIdLst>
         </p14:section>
-        <p14:section name="Backup" id="{b4aa34f4-bb70-4f3e-113c-cf1aca271dd6}">
+        <p14:section name="Backup" id="{a17a8ea6-3b7c-df59-292f-9d30840d3ba7}">
           <p14:sldIdLst>
             <p14:sldId id="282"/>
             <p14:sldId id="283"/>
@@ -5949,7 +5949,7 @@
                   <a:schemeClr val="bg1"/>
                 </a:solidFill>
               </a:rPr>
-              <a:t>Brexu-cel (CD19 CAR-T)</a:t>
+              <a:t>Brexu-cel, a CD19 CAR-T</a:t>
             </a:r>
             <a:endParaRPr lang="en-US" sz="1500" dirty="0"/>
           </a:p>
@@ -9750,7 +9750,7 @@
         </p:nvSpPr>
         <p:spPr>
           <a:xfrm>
-            <a:off x="685800" y="5486400"/>
+            <a:off x="685800" y="5120640"/>
             <a:ext cx="10817352" cy="411480"/>
           </a:xfrm>
           <a:prstGeom prst="rect">
@@ -10608,7 +10608,7 @@
                   <a:schemeClr val="tx1"/>
                 </a:solidFill>
               </a:rPr>
-              <a:t>Same regimens as HIV-negative</a:t>
+              <a:t>Standard first-line regimens</a:t>
             </a:r>
             <a:endParaRPr lang="en-US" sz="1500" dirty="0"/>
           </a:p>
@@ -10674,7 +10674,7 @@
                   <a:schemeClr val="tx1"/>
                 </a:solidFill>
               </a:rPr>
-              <a:t>Keep cART</a:t>
+              <a:t>As if HIV-negative;</a:t>
             </a:r>
             <a:endParaRPr lang="en-US" sz="1400" dirty="0"/>
           </a:p>
@@ -10688,7 +10688,7 @@
                   <a:schemeClr val="tx1"/>
                 </a:solidFill>
               </a:rPr>
-              <a:t>throughout</a:t>
+              <a:t>keep cART</a:t>
             </a:r>
             <a:endParaRPr lang="en-US" sz="1400" dirty="0"/>
           </a:p>

--- a/slides/decks/s28-aggressive-lymphoma.pptx
+++ b/slides/decks/s28-aggressive-lymphoma.pptx
@@ -135,13 +135,13 @@
   <p:extLst>
     <p:ext uri="{521415D9-36F7-43E2-AB2F-B90AF26B5E84}">
       <p14:sectionLst xmlns:p14="http://schemas.microsoft.com/office/powerpoint/2010/main">
-        <p14:section name="Opening" id="{5f7cc73f-be53-130f-d772-8d1d0b5759ed}">
+        <p14:section name="Opening" id="{40e3a754-b020-22ca-44f1-6d6796c2ba06}">
           <p14:sldIdLst>
             <p14:sldId id="256"/>
             <p14:sldId id="257"/>
           </p14:sldIdLst>
         </p14:section>
-        <p14:section name="Large B-cell lymphoma" id="{5b83aa19-1823-2548-4b52-ec3de56a75ac}">
+        <p14:section name="Large B-cell lymphoma" id="{448da2d8-2fbd-190a-5935-ad54c8e4005b}">
           <p14:sldIdLst>
             <p14:sldId id="258"/>
             <p14:sldId id="259"/>
@@ -151,14 +151,14 @@
             <p14:sldId id="263"/>
           </p14:sldIdLst>
         </p14:section>
-        <p14:section name="Mantle cell lymphoma" id="{6a4332bf-f45d-333b-2674-5a795641d28e}">
+        <p14:section name="Mantle cell lymphoma" id="{bf031bc7-98ca-1f15-9bac-82dcd17c404d}">
           <p14:sldIdLst>
             <p14:sldId id="264"/>
             <p14:sldId id="265"/>
             <p14:sldId id="266"/>
           </p14:sldIdLst>
         </p14:section>
-        <p14:section name="Other aggressive lymphomas" id="{3b0c7afb-9ae2-fba1-9b67-92ae9aaa7cf6}">
+        <p14:section name="Other aggressive lymphomas" id="{4eeef943-2e14-2f8e-922f-b1cf2d813a73}">
           <p14:sldIdLst>
             <p14:sldId id="267"/>
             <p14:sldId id="268"/>
@@ -166,7 +166,7 @@
             <p14:sldId id="270"/>
           </p14:sldIdLst>
         </p14:section>
-        <p14:section name="Board questions" id="{5eafbf2e-c4bc-7329-865e-b657da0c73c0}">
+        <p14:section name="Board questions" id="{895408ea-fe80-4ec7-d059-69e482309e7d}">
           <p14:sldIdLst>
             <p14:sldId id="271"/>
             <p14:sldId id="272"/>
@@ -176,7 +176,7 @@
             <p14:sldId id="276"/>
           </p14:sldIdLst>
         </p14:section>
-        <p14:section name="References" id="{e2713189-7034-e38e-6980-0ee42424450d}">
+        <p14:section name="References" id="{9d6a2a4f-2a78-d2ec-9463-2f782bea57be}">
           <p14:sldIdLst>
             <p14:sldId id="277"/>
             <p14:sldId id="278"/>
@@ -185,7 +185,7 @@
             <p14:sldId id="281"/>
           </p14:sldIdLst>
         </p14:section>
-        <p14:section name="Backup" id="{a17a8ea6-3b7c-df59-292f-9d30840d3ba7}">
+        <p14:section name="Backup" id="{4a741fe2-e2b1-45fa-77aa-dce08d30b5dd}">
           <p14:sldIdLst>
             <p14:sldId id="282"/>
             <p14:sldId id="283"/>
